--- a/files/Client_Scenarios_Team_One.pptx
+++ b/files/Client_Scenarios_Team_One.pptx
@@ -1336,7 +1336,7 @@
                 <a:ea typeface="Calibri"/>
                 <a:cs typeface="Calibri"/>
               </a:rPr>
-              <a:t>1 / 5</a:t>
+              <a:t>1 / 6</a:t>
             </a:r>
           </a:p>
         </p:txBody>
